--- a/classes/parte-7-red-team-y-operaciones-ofensivas/180-adversary-emulation-con-atomic-red-team-y-caldera/clase-180-presentacion.pptx
+++ b/classes/parte-7-red-team-y-operaciones-ofensivas/180-adversary-emulation-con-atomic-red-team-y-caldera/clase-180-presentacion.pptx
@@ -17,6 +17,9 @@
     <p:sldId id="265" r:id="rId16"/>
     <p:sldId id="266" r:id="rId17"/>
     <p:sldId id="267" r:id="rId18"/>
+    <p:sldId id="268" r:id="rId19"/>
+    <p:sldId id="269" r:id="rId20"/>
+    <p:sldId id="270" r:id="rId21"/>
   </p:sldIdLst>
   <p:sldSz cx="9144000" cy="6858000" type="screen4x3"/>
   <p:notesSz cx="6858000" cy="9144000"/>
@@ -3198,7 +3201,7 @@
                   <a:srgbClr val="0B3D2E"/>
                 </a:solidFill>
               </a:rPr>
-              <a:t>⚠️ Errores comunes</a:t>
+              <a:t>✍️ Ejercicios</a:t>
             </a:r>
           </a:p>
         </p:txBody>
@@ -3236,67 +3239,82 @@
                   <a:srgbClr val="22282E"/>
                 </a:solidFill>
               </a:rPr>
-              <a:t>•  Install-AtomicRedTeam falla — ExecutionPolicy o TLS; ajusta la policy en la VM de lab</a:t>
-            </a:r>
-          </a:p>
-          <a:p>
-            <a:pPr>
-              <a:spcAft>
-                <a:spcPts val="600"/>
-              </a:spcAft>
-            </a:pPr>
-            <a:r>
-              <a:rPr sz="1500">
-                <a:solidFill>
-                  <a:srgbClr val="22282E"/>
-                </a:solidFill>
-              </a:rPr>
-              <a:t>•  Un test deja residuos — No corriste -Cleanup; usa snapshots y limpia siempre</a:t>
-            </a:r>
-          </a:p>
-          <a:p>
-            <a:pPr>
-              <a:spcAft>
-                <a:spcPts val="600"/>
-              </a:spcAft>
-            </a:pPr>
-            <a:r>
-              <a:rPr sz="1500">
-                <a:solidFill>
-                  <a:srgbClr val="22282E"/>
-                </a:solidFill>
-              </a:rPr>
-              <a:t>•  Agente Caldera no aparece — Egress/firewall bloquea; revisa la URL del server y conectividad del lab</a:t>
-            </a:r>
-          </a:p>
-          <a:p>
-            <a:pPr>
-              <a:spcAft>
-                <a:spcPts val="600"/>
-              </a:spcAft>
-            </a:pPr>
-            <a:r>
-              <a:rPr sz="1500">
-                <a:solidFill>
-                  <a:srgbClr val="22282E"/>
-                </a:solidFill>
-              </a:rPr>
-              <a:t>•  El planner no avanza — Faltan facts/requisitos de las abilities; revisa dependencias</a:t>
-            </a:r>
-          </a:p>
-          <a:p>
-            <a:pPr>
-              <a:spcAft>
-                <a:spcPts val="600"/>
-              </a:spcAft>
-            </a:pPr>
-            <a:r>
-              <a:rPr sz="1500">
-                <a:solidFill>
-                  <a:srgbClr val="22282E"/>
-                </a:solidFill>
-              </a:rPr>
-              <a:t>•  Detección incoherente — SIEM sin la fuente de datos; instrumenta antes de emular</a:t>
+              <a:t>•  Ejecuta 3 tests atómicos de técnicas distintas y limpia tras cada uno.</a:t>
+            </a:r>
+          </a:p>
+          <a:p>
+            <a:pPr>
+              <a:spcAft>
+                <a:spcPts val="600"/>
+              </a:spcAft>
+            </a:pPr>
+            <a:r>
+              <a:rPr sz="1500">
+                <a:solidFill>
+                  <a:srgbClr val="22282E"/>
+                </a:solidFill>
+              </a:rPr>
+              <a:t>•  Para cada test, verifica si tu SIEM lo detecta y anótalo.</a:t>
+            </a:r>
+          </a:p>
+          <a:p>
+            <a:pPr>
+              <a:spcAft>
+                <a:spcPts val="600"/>
+              </a:spcAft>
+            </a:pPr>
+            <a:r>
+              <a:rPr sz="1500">
+                <a:solidFill>
+                  <a:srgbClr val="22282E"/>
+                </a:solidFill>
+              </a:rPr>
+              <a:t>•  Despliega un agente Caldera y confírmalo en la consola.</a:t>
+            </a:r>
+          </a:p>
+          <a:p>
+            <a:pPr>
+              <a:spcAft>
+                <a:spcPts val="600"/>
+              </a:spcAft>
+            </a:pPr>
+            <a:r>
+              <a:rPr sz="1500">
+                <a:solidFill>
+                  <a:srgbClr val="22282E"/>
+                </a:solidFill>
+              </a:rPr>
+              <a:t>•  Crea un adversary profile con 4 abilities encadenadas.</a:t>
+            </a:r>
+          </a:p>
+          <a:p>
+            <a:pPr>
+              <a:spcAft>
+                <a:spcPts val="600"/>
+              </a:spcAft>
+            </a:pPr>
+            <a:r>
+              <a:rPr sz="1500">
+                <a:solidFill>
+                  <a:srgbClr val="22282E"/>
+                </a:solidFill>
+              </a:rPr>
+              <a:t>•  Lanza la operación y documenta la secuencia del planner.</a:t>
+            </a:r>
+          </a:p>
+          <a:p>
+            <a:pPr>
+              <a:spcAft>
+                <a:spcPts val="600"/>
+              </a:spcAft>
+            </a:pPr>
+            <a:r>
+              <a:rPr sz="1500">
+                <a:solidFill>
+                  <a:srgbClr val="22282E"/>
+                </a:solidFill>
+              </a:rPr>
+              <a:t>•  Genera una capa de cobertura en Navigator con lo emulado.</a:t>
             </a:r>
           </a:p>
         </p:txBody>
@@ -3347,7 +3365,7 @@
                   <a:srgbClr val="0B3D2E"/>
                 </a:solidFill>
               </a:rPr>
-              <a:t>❓ Preguntas frecuentes</a:t>
+              <a:t>📝 Reto verificable</a:t>
             </a:r>
           </a:p>
         </p:txBody>
@@ -3385,82 +3403,22 @@
                   <a:srgbClr val="22282E"/>
                 </a:solidFill>
               </a:rPr>
-              <a:t>•  ❓ ¿Atomic Red Team o Caldera?</a:t>
-            </a:r>
-          </a:p>
-          <a:p>
-            <a:pPr>
-              <a:spcAft>
-                <a:spcPts val="600"/>
-              </a:spcAft>
-            </a:pPr>
-            <a:r>
-              <a:rPr sz="1500">
-                <a:solidFill>
-                  <a:srgbClr val="22282E"/>
-                </a:solidFill>
-              </a:rPr>
-              <a:t>•  Complementarios: Atomic para validar detecciones técnica por técnica; Caldera para emular cadenas de ataque autónomas de un actor. Juntos cubren el espectro.</a:t>
-            </a:r>
-          </a:p>
-          <a:p>
-            <a:pPr>
-              <a:spcAft>
-                <a:spcPts val="600"/>
-              </a:spcAft>
-            </a:pPr>
-            <a:r>
-              <a:rPr sz="1500">
-                <a:solidFill>
-                  <a:srgbClr val="22282E"/>
-                </a:solidFill>
-              </a:rPr>
-              <a:t>•  ❓ ¿Es seguro correr Atomic en cualquier máquina?</a:t>
-            </a:r>
-          </a:p>
-          <a:p>
-            <a:pPr>
-              <a:spcAft>
-                <a:spcPts val="600"/>
-              </a:spcAft>
-            </a:pPr>
-            <a:r>
-              <a:rPr sz="1500">
-                <a:solidFill>
-                  <a:srgbClr val="22282E"/>
-                </a:solidFill>
-              </a:rPr>
-              <a:t>•  No. Ejecuta acciones ofensivas reales; úsalo solo en labs con snapshots y tras leer qué hace cada test. Nunca en producción.</a:t>
-            </a:r>
-          </a:p>
-          <a:p>
-            <a:pPr>
-              <a:spcAft>
-                <a:spcPts val="600"/>
-              </a:spcAft>
-            </a:pPr>
-            <a:r>
-              <a:rPr sz="1500">
-                <a:solidFill>
-                  <a:srgbClr val="22282E"/>
-                </a:solidFill>
-              </a:rPr>
-              <a:t>•  ❓ ¿Esto reemplaza al Red Team humano?</a:t>
-            </a:r>
-          </a:p>
-          <a:p>
-            <a:pPr>
-              <a:spcAft>
-                <a:spcPts val="600"/>
-              </a:spcAft>
-            </a:pPr>
-            <a:r>
-              <a:rPr sz="1500">
-                <a:solidFill>
-                  <a:srgbClr val="22282E"/>
-                </a:solidFill>
-              </a:rPr>
-              <a:t>•  No. Automatiza la emulación repetible y la validación de detecciones, pero la creatividad, el OPSEC y la adaptación al entorno siguen siendo humanas.</a:t>
+              <a:t>•  Ejecuta una campaña de emulación automatizada en tu lab combinando ambas herramientas: al menos 5 tests atómicos y una operación de Caldera con un perfil de 4+ abilities, validando la detección de…</a:t>
+            </a:r>
+          </a:p>
+          <a:p>
+            <a:pPr>
+              <a:spcAft>
+                <a:spcPts val="600"/>
+              </a:spcAft>
+            </a:pPr>
+            <a:r>
+              <a:rPr sz="1500">
+                <a:solidFill>
+                  <a:srgbClr val="22282E"/>
+                </a:solidFill>
+              </a:rPr>
+              <a:t>•  Criterio de aceptación: presentas la salida de los 5 tests atómicos (con su limpieza), la operación de Caldera con su secuencia de abilities, y una capa de Navigator que marca cada técnica emulada…</a:t>
             </a:r>
           </a:p>
         </p:txBody>
@@ -3511,7 +3469,7 @@
                   <a:srgbClr val="0B3D2E"/>
                 </a:solidFill>
               </a:rPr>
-              <a:t>🔗 Referencias</a:t>
+              <a:t>⚠️ Errores comunes</a:t>
             </a:r>
           </a:p>
         </p:txBody>
@@ -3549,56 +3507,489 @@
                   <a:srgbClr val="22282E"/>
                 </a:solidFill>
               </a:rPr>
-              <a:t>•  Atomic Red Team (Red Canary). &lt;https://github.com/redcanaryco/atomic-red-team&gt; · &lt;https://atomicredteam.io/&gt;</a:t>
-            </a:r>
-          </a:p>
-          <a:p>
-            <a:pPr>
-              <a:spcAft>
-                <a:spcPts val="600"/>
-              </a:spcAft>
-            </a:pPr>
-            <a:r>
-              <a:rPr sz="1500">
-                <a:solidFill>
-                  <a:srgbClr val="22282E"/>
-                </a:solidFill>
-              </a:rPr>
-              <a:t>•  Invoke-AtomicRedTeam. &lt;https://github.com/redcanaryco/invoke-atomicredteam&gt;</a:t>
-            </a:r>
-          </a:p>
-          <a:p>
-            <a:pPr>
-              <a:spcAft>
-                <a:spcPts val="600"/>
-              </a:spcAft>
-            </a:pPr>
-            <a:r>
-              <a:rPr sz="1500">
-                <a:solidFill>
-                  <a:srgbClr val="22282E"/>
-                </a:solidFill>
-              </a:rPr>
-              <a:t>•  MITRE Caldera. &lt;https://caldera.mitre.org/&gt; · &lt;https://github.com/mitre/caldera&gt;</a:t>
-            </a:r>
-          </a:p>
-          <a:p>
-            <a:pPr>
-              <a:spcAft>
-                <a:spcPts val="600"/>
-              </a:spcAft>
-            </a:pPr>
-            <a:r>
-              <a:rPr sz="1500">
-                <a:solidFill>
-                  <a:srgbClr val="22282E"/>
-                </a:solidFill>
-              </a:rPr>
-              <a:t>•  MITRE ATT&amp;CK. &lt;https://attack.mitre.org/&gt;</a:t>
-            </a:r>
-          </a:p>
-        </p:txBody>
-      </p:sp>
+              <a:t>•  Install-AtomicRedTeam falla — ExecutionPolicy o TLS; ajusta la policy en la VM de lab</a:t>
+            </a:r>
+          </a:p>
+          <a:p>
+            <a:pPr>
+              <a:spcAft>
+                <a:spcPts val="600"/>
+              </a:spcAft>
+            </a:pPr>
+            <a:r>
+              <a:rPr sz="1500">
+                <a:solidFill>
+                  <a:srgbClr val="22282E"/>
+                </a:solidFill>
+              </a:rPr>
+              <a:t>•  Un test deja residuos — No corriste -Cleanup; usa snapshots y limpia siempre</a:t>
+            </a:r>
+          </a:p>
+          <a:p>
+            <a:pPr>
+              <a:spcAft>
+                <a:spcPts val="600"/>
+              </a:spcAft>
+            </a:pPr>
+            <a:r>
+              <a:rPr sz="1500">
+                <a:solidFill>
+                  <a:srgbClr val="22282E"/>
+                </a:solidFill>
+              </a:rPr>
+              <a:t>•  Agente Caldera no aparece — Egress/firewall bloquea; revisa la URL del server y conectividad del lab</a:t>
+            </a:r>
+          </a:p>
+          <a:p>
+            <a:pPr>
+              <a:spcAft>
+                <a:spcPts val="600"/>
+              </a:spcAft>
+            </a:pPr>
+            <a:r>
+              <a:rPr sz="1500">
+                <a:solidFill>
+                  <a:srgbClr val="22282E"/>
+                </a:solidFill>
+              </a:rPr>
+              <a:t>•  El planner no avanza — Faltan facts/requisitos de las abilities; revisa dependencias</a:t>
+            </a:r>
+          </a:p>
+          <a:p>
+            <a:pPr>
+              <a:spcAft>
+                <a:spcPts val="600"/>
+              </a:spcAft>
+            </a:pPr>
+            <a:r>
+              <a:rPr sz="1500">
+                <a:solidFill>
+                  <a:srgbClr val="22282E"/>
+                </a:solidFill>
+              </a:rPr>
+              <a:t>•  Detección incoherente — SIEM sin la fuente de datos; instrumenta antes de emular</a:t>
+            </a:r>
+          </a:p>
+        </p:txBody>
+      </p:sp>
+    </p:spTree>
+  </p:cSld>
+  <p:clrMapOvr>
+    <a:masterClrMapping/>
+  </p:clrMapOvr>
+</p:sld>
+</file>
+
+<file path=ppt/slides/slide13.xml><?xml version="1.0" encoding="utf-8"?>
+<p:sld xmlns:a="http://schemas.openxmlformats.org/drawingml/2006/main" xmlns:p="http://schemas.openxmlformats.org/presentationml/2006/main" xmlns:r="http://schemas.openxmlformats.org/officeDocument/2006/relationships">
+  <p:cSld>
+    <p:spTree>
+      <p:nvGrpSpPr>
+        <p:cNvPr id="1" name=""/>
+        <p:cNvGrpSpPr/>
+        <p:nvPr/>
+      </p:nvGrpSpPr>
+      <p:grpSpPr/>
+      <p:sp>
+        <p:nvSpPr>
+          <p:cNvPr id="2" name="TextBox 1"/>
+          <p:cNvSpPr txBox="1"/>
+          <p:nvPr/>
+        </p:nvSpPr>
+        <p:spPr>
+          <a:xfrm>
+            <a:off x="457200" y="320040"/>
+            <a:ext cx="8229600" cy="822960"/>
+          </a:xfrm>
+          <a:prstGeom prst="rect">
+            <a:avLst/>
+          </a:prstGeom>
+          <a:noFill/>
+        </p:spPr>
+        <p:txBody>
+          <a:bodyPr wrap="square">
+            <a:spAutoFit/>
+          </a:bodyPr>
+          <a:lstStyle/>
+          <a:p>
+            <a:r>
+              <a:rPr sz="2600" b="1">
+                <a:solidFill>
+                  <a:srgbClr val="0B3D2E"/>
+                </a:solidFill>
+              </a:rPr>
+              <a:t>❓ Preguntas frecuentes</a:t>
+            </a:r>
+          </a:p>
+        </p:txBody>
+      </p:sp>
+      <p:sp>
+        <p:nvSpPr>
+          <p:cNvPr id="3" name="TextBox 2"/>
+          <p:cNvSpPr txBox="1"/>
+          <p:nvPr/>
+        </p:nvSpPr>
+        <p:spPr>
+          <a:xfrm>
+            <a:off x="457200" y="1280160"/>
+            <a:ext cx="8229600" cy="4937760"/>
+          </a:xfrm>
+          <a:prstGeom prst="rect">
+            <a:avLst/>
+          </a:prstGeom>
+          <a:noFill/>
+        </p:spPr>
+        <p:txBody>
+          <a:bodyPr wrap="square">
+            <a:spAutoFit/>
+          </a:bodyPr>
+          <a:lstStyle/>
+          <a:p>
+            <a:pPr>
+              <a:spcAft>
+                <a:spcPts val="600"/>
+              </a:spcAft>
+            </a:pPr>
+            <a:r>
+              <a:rPr sz="1500">
+                <a:solidFill>
+                  <a:srgbClr val="22282E"/>
+                </a:solidFill>
+              </a:rPr>
+              <a:t>•  ❓ ¿Atomic Red Team o Caldera?</a:t>
+            </a:r>
+          </a:p>
+          <a:p>
+            <a:pPr>
+              <a:spcAft>
+                <a:spcPts val="600"/>
+              </a:spcAft>
+            </a:pPr>
+            <a:r>
+              <a:rPr sz="1500">
+                <a:solidFill>
+                  <a:srgbClr val="22282E"/>
+                </a:solidFill>
+              </a:rPr>
+              <a:t>•  Complementarios: Atomic para validar detecciones técnica por técnica; Caldera para emular cadenas de ataque autónomas de un actor. Juntos cubren el espectro.</a:t>
+            </a:r>
+          </a:p>
+          <a:p>
+            <a:pPr>
+              <a:spcAft>
+                <a:spcPts val="600"/>
+              </a:spcAft>
+            </a:pPr>
+            <a:r>
+              <a:rPr sz="1500">
+                <a:solidFill>
+                  <a:srgbClr val="22282E"/>
+                </a:solidFill>
+              </a:rPr>
+              <a:t>•  ❓ ¿Es seguro correr Atomic en cualquier máquina?</a:t>
+            </a:r>
+          </a:p>
+          <a:p>
+            <a:pPr>
+              <a:spcAft>
+                <a:spcPts val="600"/>
+              </a:spcAft>
+            </a:pPr>
+            <a:r>
+              <a:rPr sz="1500">
+                <a:solidFill>
+                  <a:srgbClr val="22282E"/>
+                </a:solidFill>
+              </a:rPr>
+              <a:t>•  No. Ejecuta acciones ofensivas reales; úsalo solo en labs con snapshots y tras leer qué hace cada test. Nunca en producción.</a:t>
+            </a:r>
+          </a:p>
+          <a:p>
+            <a:pPr>
+              <a:spcAft>
+                <a:spcPts val="600"/>
+              </a:spcAft>
+            </a:pPr>
+            <a:r>
+              <a:rPr sz="1500">
+                <a:solidFill>
+                  <a:srgbClr val="22282E"/>
+                </a:solidFill>
+              </a:rPr>
+              <a:t>•  ❓ ¿Esto reemplaza al Red Team humano?</a:t>
+            </a:r>
+          </a:p>
+          <a:p>
+            <a:pPr>
+              <a:spcAft>
+                <a:spcPts val="600"/>
+              </a:spcAft>
+            </a:pPr>
+            <a:r>
+              <a:rPr sz="1500">
+                <a:solidFill>
+                  <a:srgbClr val="22282E"/>
+                </a:solidFill>
+              </a:rPr>
+              <a:t>•  No. Automatiza la emulación repetible y la validación de detecciones, pero la creatividad, el OPSEC y la adaptación al entorno siguen siendo humanas.</a:t>
+            </a:r>
+          </a:p>
+        </p:txBody>
+      </p:sp>
+    </p:spTree>
+  </p:cSld>
+  <p:clrMapOvr>
+    <a:masterClrMapping/>
+  </p:clrMapOvr>
+</p:sld>
+</file>
+
+<file path=ppt/slides/slide14.xml><?xml version="1.0" encoding="utf-8"?>
+<p:sld xmlns:a="http://schemas.openxmlformats.org/drawingml/2006/main" xmlns:p="http://schemas.openxmlformats.org/presentationml/2006/main" xmlns:r="http://schemas.openxmlformats.org/officeDocument/2006/relationships">
+  <p:cSld>
+    <p:spTree>
+      <p:nvGrpSpPr>
+        <p:cNvPr id="1" name=""/>
+        <p:cNvGrpSpPr/>
+        <p:nvPr/>
+      </p:nvGrpSpPr>
+      <p:grpSpPr/>
+      <p:sp>
+        <p:nvSpPr>
+          <p:cNvPr id="2" name="TextBox 1"/>
+          <p:cNvSpPr txBox="1"/>
+          <p:nvPr/>
+        </p:nvSpPr>
+        <p:spPr>
+          <a:xfrm>
+            <a:off x="457200" y="320040"/>
+            <a:ext cx="8229600" cy="822960"/>
+          </a:xfrm>
+          <a:prstGeom prst="rect">
+            <a:avLst/>
+          </a:prstGeom>
+          <a:noFill/>
+        </p:spPr>
+        <p:txBody>
+          <a:bodyPr wrap="square">
+            <a:spAutoFit/>
+          </a:bodyPr>
+          <a:lstStyle/>
+          <a:p>
+            <a:r>
+              <a:rPr sz="2600" b="1">
+                <a:solidFill>
+                  <a:srgbClr val="0B3D2E"/>
+                </a:solidFill>
+              </a:rPr>
+              <a:t>🔗 Referencias</a:t>
+            </a:r>
+          </a:p>
+        </p:txBody>
+      </p:sp>
+      <p:sp>
+        <p:nvSpPr>
+          <p:cNvPr id="3" name="TextBox 2"/>
+          <p:cNvSpPr txBox="1"/>
+          <p:nvPr/>
+        </p:nvSpPr>
+        <p:spPr>
+          <a:xfrm>
+            <a:off x="457200" y="1280160"/>
+            <a:ext cx="8229600" cy="4937760"/>
+          </a:xfrm>
+          <a:prstGeom prst="rect">
+            <a:avLst/>
+          </a:prstGeom>
+          <a:noFill/>
+        </p:spPr>
+        <p:txBody>
+          <a:bodyPr wrap="square">
+            <a:spAutoFit/>
+          </a:bodyPr>
+          <a:lstStyle/>
+          <a:p>
+            <a:pPr>
+              <a:spcAft>
+                <a:spcPts val="600"/>
+              </a:spcAft>
+            </a:pPr>
+            <a:r>
+              <a:rPr sz="1500">
+                <a:solidFill>
+                  <a:srgbClr val="22282E"/>
+                </a:solidFill>
+              </a:rPr>
+              <a:t>•  Atomic Red Team — documentación oficial. &lt;https://www.atomicredteam.io/docs/atomic-red-team&gt; — fuente para estructura, autorización, entorno de prueba, dependencias y limpieza.</a:t>
+            </a:r>
+          </a:p>
+          <a:p>
+            <a:pPr>
+              <a:spcAft>
+                <a:spcPts val="600"/>
+              </a:spcAft>
+            </a:pPr>
+            <a:r>
+              <a:rPr sz="1500">
+                <a:solidFill>
+                  <a:srgbClr val="22282E"/>
+                </a:solidFill>
+              </a:rPr>
+              <a:t>•  Invoke-AtomicRedTeam — Check Prerequisites y Cleanup. &lt;https://www.atomicredteam.io/docs/invoke-atomicredteam/check-prereqs&gt; — sustenta la preparación y reversión explícita de cada test.</a:t>
+            </a:r>
+          </a:p>
+          <a:p>
+            <a:pPr>
+              <a:spcAft>
+                <a:spcPts val="600"/>
+              </a:spcAft>
+            </a:pPr>
+            <a:r>
+              <a:rPr sz="1500">
+                <a:solidFill>
+                  <a:srgbClr val="22282E"/>
+                </a:solidFill>
+              </a:rPr>
+              <a:t>•  Invoke-AtomicRedTeam — repositorio oficial. &lt;https://github.com/redcanaryco/invoke-atomicredteam&gt; — fuente utilizada para fijar la versión del runner en el laboratorio.</a:t>
+            </a:r>
+          </a:p>
+          <a:p>
+            <a:pPr>
+              <a:spcAft>
+                <a:spcPts val="600"/>
+              </a:spcAft>
+            </a:pPr>
+            <a:r>
+              <a:rPr sz="1500">
+                <a:solidFill>
+                  <a:srgbClr val="22282E"/>
+                </a:solidFill>
+              </a:rPr>
+              <a:t>•  Apache Caldera (Incubating). &lt;https://caldera.apache.org/&gt; — portal vigente de la plataforma y referencia de su finalidad y componentes.</a:t>
+            </a:r>
+          </a:p>
+          <a:p>
+            <a:pPr>
+              <a:spcAft>
+                <a:spcPts val="600"/>
+              </a:spcAft>
+            </a:pPr>
+            <a:r>
+              <a:rPr sz="1500">
+                <a:solidFill>
+                  <a:srgbClr val="22282E"/>
+                </a:solidFill>
+              </a:rPr>
+              <a:t>•  Apache Caldera. &lt;https://github.com/apache/caldera&gt; — repositorio vigente usado para fijar versión, revisar requisitos y desplegar el laboratorio.</a:t>
+            </a:r>
+          </a:p>
+          <a:p>
+            <a:pPr>
+              <a:spcAft>
+                <a:spcPts val="600"/>
+              </a:spcAft>
+            </a:pPr>
+            <a:r>
+              <a:rPr sz="1500">
+                <a:solidFill>
+                  <a:srgbClr val="22282E"/>
+                </a:solidFill>
+              </a:rPr>
+              <a:t>•  MITRE — MITRE Contributes Caldera to the Apache Incubator. &lt;https://www.mitre.org/news-insights/news-release/mitre-contributes-caldera-apache-incubator-expand-open-cybersecurity&gt; — fuente primaria…</a:t>
+            </a:r>
+          </a:p>
+          <a:p>
+            <a:pPr>
+              <a:spcAft>
+                <a:spcPts val="600"/>
+              </a:spcAft>
+            </a:pPr>
+            <a:r>
+              <a:rPr sz="1500">
+                <a:solidFill>
+                  <a:srgbClr val="22282E"/>
+                </a:solidFill>
+              </a:rPr>
+              <a:t>•  MITRE ATT&amp;CK. &lt;https://attack.mitre.org/&gt; — vocabulario para mapear comportamiento; el resultado se conserva por prueba concreta.</a:t>
+            </a:r>
+          </a:p>
+        </p:txBody>
+      </p:sp>
+    </p:spTree>
+  </p:cSld>
+  <p:clrMapOvr>
+    <a:masterClrMapping/>
+  </p:clrMapOvr>
+</p:sld>
+</file>
+
+<file path=ppt/slides/slide15.xml><?xml version="1.0" encoding="utf-8"?>
+<p:sld xmlns:a="http://schemas.openxmlformats.org/drawingml/2006/main" xmlns:p="http://schemas.openxmlformats.org/presentationml/2006/main" xmlns:r="http://schemas.openxmlformats.org/officeDocument/2006/relationships">
+  <p:cSld>
+    <p:spTree>
+      <p:nvGrpSpPr>
+        <p:cNvPr id="1" name=""/>
+        <p:cNvGrpSpPr/>
+        <p:nvPr/>
+      </p:nvGrpSpPr>
+      <p:grpSpPr/>
+      <p:sp>
+        <p:nvSpPr>
+          <p:cNvPr id="2" name="TextBox 1"/>
+          <p:cNvSpPr txBox="1"/>
+          <p:nvPr/>
+        </p:nvSpPr>
+        <p:spPr>
+          <a:xfrm>
+            <a:off x="457200" y="274320"/>
+            <a:ext cx="8229600" cy="640080"/>
+          </a:xfrm>
+          <a:prstGeom prst="rect">
+            <a:avLst/>
+          </a:prstGeom>
+          <a:noFill/>
+        </p:spPr>
+        <p:txBody>
+          <a:bodyPr wrap="square">
+            <a:spAutoFit/>
+          </a:bodyPr>
+          <a:lstStyle/>
+          <a:p>
+            <a:r>
+              <a:rPr sz="2200" b="1">
+                <a:solidFill>
+                  <a:srgbClr val="0B3D2E"/>
+                </a:solidFill>
+              </a:rPr>
+              <a:t>Diagrama de la clase</a:t>
+            </a:r>
+          </a:p>
+        </p:txBody>
+      </p:sp>
+      <p:pic>
+        <p:nvPicPr>
+          <p:cNvPr id="3" name="Picture 2" descr="18068b7922fafcc5.png"/>
+          <p:cNvPicPr>
+            <a:picLocks noChangeAspect="1"/>
+          </p:cNvPicPr>
+          <p:nvPr/>
+        </p:nvPicPr>
+        <p:blipFill>
+          <a:blip r:embed="rId2"/>
+          <a:stretch>
+            <a:fillRect/>
+          </a:stretch>
+        </p:blipFill>
+        <p:spPr>
+          <a:xfrm>
+            <a:off x="3028871" y="1097280"/>
+            <a:ext cx="3086258" cy="5303520"/>
+          </a:xfrm>
+          <a:prstGeom prst="rect">
+            <a:avLst/>
+          </a:prstGeom>
+        </p:spPr>
+      </p:pic>
     </p:spTree>
   </p:cSld>
   <p:clrMapOvr>
@@ -3683,7 +4074,7 @@
                   <a:srgbClr val="22282E"/>
                 </a:solidFill>
               </a:rPr>
-              <a:t>•  Automatizar la emulación de adversarios con dos herramientas complementarias: Atomic Red Team (tests atómicos por técnica ATT&amp;CK) y MITRE Caldera (framework de emulación autónoma con agentes y planificador). El alumno ejecutará pruebas reproducibles en su lab, medirá la detección y cerrará el círculo entre ofensiva y defensa que abre y cierra esta parte.</a:t>
+              <a:t>•  Automatizar la emulación de adversarios con dos herramientas complementarias: Atomic Red Team (tests atómicos por técnica ATT&amp;CK) y Apache Caldera (framework de emulación con agentes y…</a:t>
             </a:r>
           </a:p>
         </p:txBody>
@@ -4077,7 +4468,7 @@
                   <a:srgbClr val="0B3D2E"/>
                 </a:solidFill>
               </a:rPr>
-              <a:t>📖 Definiciones y características</a:t>
+              <a:t>🧠 Explicación en profundidad</a:t>
             </a:r>
           </a:p>
         </p:txBody>
@@ -4115,82 +4506,97 @@
                   <a:srgbClr val="22282E"/>
                 </a:solidFill>
               </a:rPr>
-              <a:t>•  Atomic Red Team: biblioteca de pruebas pequeñas y aisladas, una por técnica ATT&amp;CK. Característica: reproducibles y fáciles de auditar.</a:t>
-            </a:r>
-          </a:p>
-          <a:p>
-            <a:pPr>
-              <a:spcAft>
-                <a:spcPts val="600"/>
-              </a:spcAft>
-            </a:pPr>
-            <a:r>
-              <a:rPr sz="1500">
-                <a:solidFill>
-                  <a:srgbClr val="22282E"/>
-                </a:solidFill>
-              </a:rPr>
-              <a:t>•  Atomic test: comando/acción concreto que ejercita una técnica. Característica: granular, ideal para validar una detección.</a:t>
-            </a:r>
-          </a:p>
-          <a:p>
-            <a:pPr>
-              <a:spcAft>
-                <a:spcPts val="600"/>
-              </a:spcAft>
-            </a:pPr>
-            <a:r>
-              <a:rPr sz="1500">
-                <a:solidFill>
-                  <a:srgbClr val="22282E"/>
-                </a:solidFill>
-              </a:rPr>
-              <a:t>•  Caldera: plataforma de MITRE para emulación autónoma. Característica: agentes + planificador que ejecutan cadenas de TTPs.</a:t>
-            </a:r>
-          </a:p>
-          <a:p>
-            <a:pPr>
-              <a:spcAft>
-                <a:spcPts val="600"/>
-              </a:spcAft>
-            </a:pPr>
-            <a:r>
-              <a:rPr sz="1500">
-                <a:solidFill>
-                  <a:srgbClr val="22282E"/>
-                </a:solidFill>
-              </a:rPr>
-              <a:t>•  Ability: unidad ejecutable en Caldera ligada a una técnica ATT&amp;CK. Característica: componible en perfiles.</a:t>
-            </a:r>
-          </a:p>
-          <a:p>
-            <a:pPr>
-              <a:spcAft>
-                <a:spcPts val="600"/>
-              </a:spcAft>
-            </a:pPr>
-            <a:r>
-              <a:rPr sz="1500">
-                <a:solidFill>
-                  <a:srgbClr val="22282E"/>
-                </a:solidFill>
-              </a:rPr>
-              <a:t>•  Adversary profile: conjunto ordenado de abilities que emula a un actor. Característica: reutilizable y automatizable.</a:t>
-            </a:r>
-          </a:p>
-          <a:p>
-            <a:pPr>
-              <a:spcAft>
-                <a:spcPts val="600"/>
-              </a:spcAft>
-            </a:pPr>
-            <a:r>
-              <a:rPr sz="1500">
-                <a:solidFill>
-                  <a:srgbClr val="22282E"/>
-                </a:solidFill>
-              </a:rPr>
-              <a:t>•  Planner: lógica que decide qué ability ejecutar a continuación. Característica: da autonomía a la operación.</a:t>
+              <a:t>•  Atomic Red Team ofrece pruebas pequeñas, enfocadas y descritas en archivos estructurados. Son útiles para preguntar si un comportamiento concreto genera el dato o control esperado. Una emulación de…</a:t>
+            </a:r>
+          </a:p>
+          <a:p>
+            <a:pPr>
+              <a:spcAft>
+                <a:spcPts val="600"/>
+              </a:spcAft>
+            </a:pPr>
+            <a:r>
+              <a:rPr sz="1500">
+                <a:solidFill>
+                  <a:srgbClr val="22282E"/>
+                </a:solidFill>
+              </a:rPr>
+              <a:t>•  La selección comienza por una amenaza y un activo relevantes, no por ejecutar todo el catálogo. Cada prueba se revisa como código: comandos, entradas, prerrequisitos, privilegios, descargas, cambios…</a:t>
+            </a:r>
+          </a:p>
+          <a:p>
+            <a:pPr>
+              <a:spcAft>
+                <a:spcPts val="600"/>
+              </a:spcAft>
+            </a:pPr>
+            <a:r>
+              <a:rPr sz="1500">
+                <a:solidFill>
+                  <a:srgbClr val="22282E"/>
+                </a:solidFill>
+              </a:rPr>
+              <a:t>•  La definición identifica técnica, plataformas, entradas, ejecutor, comando, dependencias y, cuando corresponde, limpieza. -CheckPrereqs permite inspeccionar requisitos; obtenerlos automáticamente…</a:t>
+            </a:r>
+          </a:p>
+          <a:p>
+            <a:pPr>
+              <a:spcAft>
+                <a:spcPts val="600"/>
+              </a:spcAft>
+            </a:pPr>
+            <a:r>
+              <a:rPr sz="1500">
+                <a:solidFill>
+                  <a:srgbClr val="22282E"/>
+                </a:solidFill>
+              </a:rPr>
+              <a:t>•  El identificador del test, versión del repositorio y valores de entrada forman parte de la evidencia. Sin ellos, dos ejecuciones con el mismo ID ATT&amp;CK pueden no ser comparables.</a:t>
+            </a:r>
+          </a:p>
+          <a:p>
+            <a:pPr>
+              <a:spcAft>
+                <a:spcPts val="600"/>
+              </a:spcAft>
+            </a:pPr>
+            <a:r>
+              <a:rPr sz="1500">
+                <a:solidFill>
+                  <a:srgbClr val="22282E"/>
+                </a:solidFill>
+              </a:rPr>
+              <a:t>•  En CALDERA, un agent representa el endpoint que ejecuta tareas; una ability define una capacidad ejecutable y su mapeo; un adversary profile agrupa abilities; y un planner decide orden o elegibilidad…</a:t>
+            </a:r>
+          </a:p>
+          <a:p>
+            <a:pPr>
+              <a:spcAft>
+                <a:spcPts val="600"/>
+              </a:spcAft>
+            </a:pPr>
+            <a:r>
+              <a:rPr sz="1500">
+                <a:solidFill>
+                  <a:srgbClr val="22282E"/>
+                </a:solidFill>
+              </a:rPr>
+              <a:t>•  Autonomía no significa ausencia de supervisión. Se limitan agentes, objetivos, abilities, duración y condiciones de parada. Primero se ejecuta en modo controlado y se revisa cada comando. La…</a:t>
+            </a:r>
+          </a:p>
+          <a:p>
+            <a:pPr>
+              <a:spcAft>
+                <a:spcPts val="600"/>
+              </a:spcAft>
+            </a:pPr>
+            <a:r>
+              <a:rPr sz="1500">
+                <a:solidFill>
+                  <a:srgbClr val="22282E"/>
+                </a:solidFill>
+              </a:rPr>
+              <a:t>•  Para cada paso se registra: ¿se ejecutó?, ¿qué dato apareció?, ¿hubo prevención?, ¿se generó alerta?, ¿llegó al analista?, ¿la respuesta fue correcta? Un fallo de ejecución no equivale a una…</a:t>
             </a:r>
           </a:p>
         </p:txBody>
@@ -4241,7 +4647,7 @@
                   <a:srgbClr val="0B3D2E"/>
                 </a:solidFill>
               </a:rPr>
-              <a:t>🧰 Herramientas y preparación</a:t>
+              <a:t>📖 Definiciones y características</a:t>
             </a:r>
           </a:p>
         </p:txBody>
@@ -4279,52 +4685,82 @@
                   <a:srgbClr val="22282E"/>
                 </a:solidFill>
               </a:rPr>
-              <a:t>•  Atomic Red Team + Invoke-AtomicRedTeam (módulo PowerShell) en una VM Windows del lab.</a:t>
-            </a:r>
-          </a:p>
-          <a:p>
-            <a:pPr>
-              <a:spcAft>
-                <a:spcPts val="600"/>
-              </a:spcAft>
-            </a:pPr>
-            <a:r>
-              <a:rPr sz="1500">
-                <a:solidFill>
-                  <a:srgbClr val="22282E"/>
-                </a:solidFill>
-              </a:rPr>
-              <a:t>•  MITRE Caldera (Python) en un servidor de lab: git clone https://github.com/mitre/caldera --recursive &amp;&amp; pip install -r requirements.txt.</a:t>
-            </a:r>
-          </a:p>
-          <a:p>
-            <a:pPr>
-              <a:spcAft>
-                <a:spcPts val="600"/>
-              </a:spcAft>
-            </a:pPr>
-            <a:r>
-              <a:rPr sz="1500">
-                <a:solidFill>
-                  <a:srgbClr val="22282E"/>
-                </a:solidFill>
-              </a:rPr>
-              <a:t>•  Instrumentación defensiva (Sysmon + SIEM/EDR) de la Clase 178 para validar detecciones.</a:t>
-            </a:r>
-          </a:p>
-          <a:p>
-            <a:pPr>
-              <a:spcAft>
-                <a:spcPts val="600"/>
-              </a:spcAft>
-            </a:pPr>
-            <a:r>
-              <a:rPr sz="1500">
-                <a:solidFill>
-                  <a:srgbClr val="22282E"/>
-                </a:solidFill>
-              </a:rPr>
-              <a:t>•  ATT&amp;CK Navigator para reflejar la cobertura resultante.</a:t>
+              <a:t>•  Atomic Red Team: biblioteca de pruebas pequeñas y aisladas, una por técnica ATT&amp;CK. Característica: reproducibles y fáciles de auditar.</a:t>
+            </a:r>
+          </a:p>
+          <a:p>
+            <a:pPr>
+              <a:spcAft>
+                <a:spcPts val="600"/>
+              </a:spcAft>
+            </a:pPr>
+            <a:r>
+              <a:rPr sz="1500">
+                <a:solidFill>
+                  <a:srgbClr val="22282E"/>
+                </a:solidFill>
+              </a:rPr>
+              <a:t>•  Atomic test: comando/acción concreto que ejercita una técnica. Característica: granular, ideal para validar una detección.</a:t>
+            </a:r>
+          </a:p>
+          <a:p>
+            <a:pPr>
+              <a:spcAft>
+                <a:spcPts val="600"/>
+              </a:spcAft>
+            </a:pPr>
+            <a:r>
+              <a:rPr sz="1500">
+                <a:solidFill>
+                  <a:srgbClr val="22282E"/>
+                </a:solidFill>
+              </a:rPr>
+              <a:t>•  Apache Caldera (Incubating): plataforma abierta de emulación originada en MITRE y transferida a Apache Software Foundation en 2026. Característica: combina agentes, abilities, perfiles y planners.</a:t>
+            </a:r>
+          </a:p>
+          <a:p>
+            <a:pPr>
+              <a:spcAft>
+                <a:spcPts val="600"/>
+              </a:spcAft>
+            </a:pPr>
+            <a:r>
+              <a:rPr sz="1500">
+                <a:solidFill>
+                  <a:srgbClr val="22282E"/>
+                </a:solidFill>
+              </a:rPr>
+              <a:t>•  Ability: unidad ejecutable en Caldera ligada a una técnica ATT&amp;CK. Característica: componible en perfiles.</a:t>
+            </a:r>
+          </a:p>
+          <a:p>
+            <a:pPr>
+              <a:spcAft>
+                <a:spcPts val="600"/>
+              </a:spcAft>
+            </a:pPr>
+            <a:r>
+              <a:rPr sz="1500">
+                <a:solidFill>
+                  <a:srgbClr val="22282E"/>
+                </a:solidFill>
+              </a:rPr>
+              <a:t>•  Adversary profile: conjunto ordenado de abilities que emula a un actor. Característica: reutilizable y automatizable.</a:t>
+            </a:r>
+          </a:p>
+          <a:p>
+            <a:pPr>
+              <a:spcAft>
+                <a:spcPts val="600"/>
+              </a:spcAft>
+            </a:pPr>
+            <a:r>
+              <a:rPr sz="1500">
+                <a:solidFill>
+                  <a:srgbClr val="22282E"/>
+                </a:solidFill>
+              </a:rPr>
+              <a:t>•  Planner: lógica que decide qué ability ejecutar a continuación. Característica: da autonomía a la operación.</a:t>
             </a:r>
           </a:p>
         </p:txBody>
@@ -4375,7 +4811,7 @@
                   <a:srgbClr val="0B3D2E"/>
                 </a:solidFill>
               </a:rPr>
-              <a:t>🧪 Laboratorio guiado</a:t>
+              <a:t>📔 Glosario</a:t>
             </a:r>
           </a:p>
         </p:txBody>
@@ -4413,97 +4849,97 @@
                   <a:srgbClr val="22282E"/>
                 </a:solidFill>
               </a:rPr>
-              <a:t>•  Instala Atomic Red Team:</a:t>
-            </a:r>
-          </a:p>
-          <a:p>
-            <a:pPr>
-              <a:spcAft>
-                <a:spcPts val="600"/>
-              </a:spcAft>
-            </a:pPr>
-            <a:r>
-              <a:rPr sz="1500">
-                <a:solidFill>
-                  <a:srgbClr val="22282E"/>
-                </a:solidFill>
-              </a:rPr>
-              <a:t>•  IEX (IWR 'https://raw.githubusercontent.com/redcanaryco/invoke-atomicredteam/master/install-atomicredteam.ps1' -UseBasicParsing)</a:t>
-            </a:r>
-          </a:p>
-          <a:p>
-            <a:pPr>
-              <a:spcAft>
-                <a:spcPts val="600"/>
-              </a:spcAft>
-            </a:pPr>
-            <a:r>
-              <a:rPr sz="1500">
-                <a:solidFill>
-                  <a:srgbClr val="22282E"/>
-                </a:solidFill>
-              </a:rPr>
-              <a:t>•  Install-AtomicRedTeam -getAtomics</a:t>
-            </a:r>
-          </a:p>
-          <a:p>
-            <a:pPr>
-              <a:spcAft>
-                <a:spcPts val="600"/>
-              </a:spcAft>
-            </a:pPr>
-            <a:r>
-              <a:rPr sz="1500">
-                <a:solidFill>
-                  <a:srgbClr val="22282E"/>
-                </a:solidFill>
-              </a:rPr>
-              <a:t>•  Ejecuta un test atómico. Lanza un test de una técnica de esta parte, p. ej. Kerberoasting o T1059.001:</a:t>
-            </a:r>
-          </a:p>
-          <a:p>
-            <a:pPr>
-              <a:spcAft>
-                <a:spcPts val="600"/>
-              </a:spcAft>
-            </a:pPr>
-            <a:r>
-              <a:rPr sz="1500">
-                <a:solidFill>
-                  <a:srgbClr val="22282E"/>
-                </a:solidFill>
-              </a:rPr>
-              <a:t>•  Invoke-AtomicTest T1558.003 -ShowDetails</a:t>
-            </a:r>
-          </a:p>
-          <a:p>
-            <a:pPr>
-              <a:spcAft>
-                <a:spcPts val="600"/>
-              </a:spcAft>
-            </a:pPr>
-            <a:r>
-              <a:rPr sz="1500">
-                <a:solidFill>
-                  <a:srgbClr val="22282E"/>
-                </a:solidFill>
-              </a:rPr>
-              <a:t>•  Invoke-AtomicTest T1558.003</a:t>
-            </a:r>
-          </a:p>
-          <a:p>
-            <a:pPr>
-              <a:spcAft>
-                <a:spcPts val="600"/>
-              </a:spcAft>
-            </a:pPr>
-            <a:r>
-              <a:rPr sz="1500">
-                <a:solidFill>
-                  <a:srgbClr val="22282E"/>
-                </a:solidFill>
-              </a:rPr>
-              <a:t>•  Luego limpia con -Cleanup.</a:t>
+              <a:t>•  Prueba atómica: acción pequeña y enfocada que ejercita un procedimiento determinado.</a:t>
+            </a:r>
+          </a:p>
+          <a:p>
+            <a:pPr>
+              <a:spcAft>
+                <a:spcPts val="600"/>
+              </a:spcAft>
+            </a:pPr>
+            <a:r>
+              <a:rPr sz="1500">
+                <a:solidFill>
+                  <a:srgbClr val="22282E"/>
+                </a:solidFill>
+              </a:rPr>
+              <a:t>•  Execution framework: herramienta que interpreta y ejecuta definiciones de pruebas.</a:t>
+            </a:r>
+          </a:p>
+          <a:p>
+            <a:pPr>
+              <a:spcAft>
+                <a:spcPts val="600"/>
+              </a:spcAft>
+            </a:pPr>
+            <a:r>
+              <a:rPr sz="1500">
+                <a:solidFill>
+                  <a:srgbClr val="22282E"/>
+                </a:solidFill>
+              </a:rPr>
+              <a:t>•  Prerrequisito: estado, software, archivo o privilegio necesario antes de ejecutar.</a:t>
+            </a:r>
+          </a:p>
+          <a:p>
+            <a:pPr>
+              <a:spcAft>
+                <a:spcPts val="600"/>
+              </a:spcAft>
+            </a:pPr>
+            <a:r>
+              <a:rPr sz="1500">
+                <a:solidFill>
+                  <a:srgbClr val="22282E"/>
+                </a:solidFill>
+              </a:rPr>
+              <a:t>•  Cleanup: comandos destinados a revertir artefactos conocidos; no sustituye un snapshot.</a:t>
+            </a:r>
+          </a:p>
+          <a:p>
+            <a:pPr>
+              <a:spcAft>
+                <a:spcPts val="600"/>
+              </a:spcAft>
+            </a:pPr>
+            <a:r>
+              <a:rPr sz="1500">
+                <a:solidFill>
+                  <a:srgbClr val="22282E"/>
+                </a:solidFill>
+              </a:rPr>
+              <a:t>•  Emulación de adversario: representación controlada de comportamientos encadenados y orientados a objetivos.</a:t>
+            </a:r>
+          </a:p>
+          <a:p>
+            <a:pPr>
+              <a:spcAft>
+                <a:spcPts val="600"/>
+              </a:spcAft>
+            </a:pPr>
+            <a:r>
+              <a:rPr sz="1500">
+                <a:solidFill>
+                  <a:srgbClr val="22282E"/>
+                </a:solidFill>
+              </a:rPr>
+              <a:t>•  Agent: componente CALDERA que recibe y ejecuta tareas en un endpoint autorizado.</a:t>
+            </a:r>
+          </a:p>
+          <a:p>
+            <a:pPr>
+              <a:spcAft>
+                <a:spcPts val="600"/>
+              </a:spcAft>
+            </a:pPr>
+            <a:r>
+              <a:rPr sz="1500">
+                <a:solidFill>
+                  <a:srgbClr val="22282E"/>
+                </a:solidFill>
+              </a:rPr>
+              <a:t>•  Ability: capacidad ejecutable con plataforma, comando y metadatos.</a:t>
             </a:r>
           </a:p>
         </p:txBody>
@@ -4554,7 +4990,7 @@
                   <a:srgbClr val="0B3D2E"/>
                 </a:solidFill>
               </a:rPr>
-              <a:t>✍️ Ejercicios</a:t>
+              <a:t>🧰 Herramientas y preparación</a:t>
             </a:r>
           </a:p>
         </p:txBody>
@@ -4592,82 +5028,52 @@
                   <a:srgbClr val="22282E"/>
                 </a:solidFill>
               </a:rPr>
-              <a:t>•  Ejecuta 3 tests atómicos de técnicas distintas y limpia tras cada uno.</a:t>
-            </a:r>
-          </a:p>
-          <a:p>
-            <a:pPr>
-              <a:spcAft>
-                <a:spcPts val="600"/>
-              </a:spcAft>
-            </a:pPr>
-            <a:r>
-              <a:rPr sz="1500">
-                <a:solidFill>
-                  <a:srgbClr val="22282E"/>
-                </a:solidFill>
-              </a:rPr>
-              <a:t>•  Para cada test, verifica si tu SIEM lo detecta y anótalo.</a:t>
-            </a:r>
-          </a:p>
-          <a:p>
-            <a:pPr>
-              <a:spcAft>
-                <a:spcPts val="600"/>
-              </a:spcAft>
-            </a:pPr>
-            <a:r>
-              <a:rPr sz="1500">
-                <a:solidFill>
-                  <a:srgbClr val="22282E"/>
-                </a:solidFill>
-              </a:rPr>
-              <a:t>•  Despliega un agente Caldera y confírmalo en la consola.</a:t>
-            </a:r>
-          </a:p>
-          <a:p>
-            <a:pPr>
-              <a:spcAft>
-                <a:spcPts val="600"/>
-              </a:spcAft>
-            </a:pPr>
-            <a:r>
-              <a:rPr sz="1500">
-                <a:solidFill>
-                  <a:srgbClr val="22282E"/>
-                </a:solidFill>
-              </a:rPr>
-              <a:t>•  Crea un adversary profile con 4 abilities encadenadas.</a:t>
-            </a:r>
-          </a:p>
-          <a:p>
-            <a:pPr>
-              <a:spcAft>
-                <a:spcPts val="600"/>
-              </a:spcAft>
-            </a:pPr>
-            <a:r>
-              <a:rPr sz="1500">
-                <a:solidFill>
-                  <a:srgbClr val="22282E"/>
-                </a:solidFill>
-              </a:rPr>
-              <a:t>•  Lanza la operación y documenta la secuencia del planner.</a:t>
-            </a:r>
-          </a:p>
-          <a:p>
-            <a:pPr>
-              <a:spcAft>
-                <a:spcPts val="600"/>
-              </a:spcAft>
-            </a:pPr>
-            <a:r>
-              <a:rPr sz="1500">
-                <a:solidFill>
-                  <a:srgbClr val="22282E"/>
-                </a:solidFill>
-              </a:rPr>
-              <a:t>•  Genera una capa de cobertura en Navigator con lo emulado.</a:t>
+              <a:t>•  Atomic Red Team + Invoke-AtomicRedTeam (módulo PowerShell) en una VM Windows del lab.</a:t>
+            </a:r>
+          </a:p>
+          <a:p>
+            <a:pPr>
+              <a:spcAft>
+                <a:spcPts val="600"/>
+              </a:spcAft>
+            </a:pPr>
+            <a:r>
+              <a:rPr sz="1500">
+                <a:solidFill>
+                  <a:srgbClr val="22282E"/>
+                </a:solidFill>
+              </a:rPr>
+              <a:t>•  Apache Caldera (Incubating) en un servidor aislado: fija una versión del repositorio &lt;https://github.com/apache/caldera&gt;, clónala con submódulos y sigue sus requisitos vigentes. No expongas su…</a:t>
+            </a:r>
+          </a:p>
+          <a:p>
+            <a:pPr>
+              <a:spcAft>
+                <a:spcPts val="600"/>
+              </a:spcAft>
+            </a:pPr>
+            <a:r>
+              <a:rPr sz="1500">
+                <a:solidFill>
+                  <a:srgbClr val="22282E"/>
+                </a:solidFill>
+              </a:rPr>
+              <a:t>•  Instrumentación defensiva (Sysmon + SIEM/EDR) de la Clase 178 para validar detecciones.</a:t>
+            </a:r>
+          </a:p>
+          <a:p>
+            <a:pPr>
+              <a:spcAft>
+                <a:spcPts val="600"/>
+              </a:spcAft>
+            </a:pPr>
+            <a:r>
+              <a:rPr sz="1500">
+                <a:solidFill>
+                  <a:srgbClr val="22282E"/>
+                </a:solidFill>
+              </a:rPr>
+              <a:t>•  ATT&amp;CK Navigator para reflejar la cobertura resultante.</a:t>
             </a:r>
           </a:p>
         </p:txBody>
@@ -4718,7 +5124,7 @@
                   <a:srgbClr val="0B3D2E"/>
                 </a:solidFill>
               </a:rPr>
-              <a:t>📝 Reto verificable</a:t>
+              <a:t>🧪 Laboratorio guiado</a:t>
             </a:r>
           </a:p>
         </p:txBody>
@@ -4756,22 +5162,97 @@
                   <a:srgbClr val="22282E"/>
                 </a:solidFill>
               </a:rPr>
-              <a:t>•  Ejecuta una campaña de emulación automatizada en tu lab combinando ambas herramientas: al menos 5 tests atómicos y una operación de Caldera con un perfil de 4+ abilities, validando la detección de cada TTP en tu SIEM/EDR.</a:t>
-            </a:r>
-          </a:p>
-          <a:p>
-            <a:pPr>
-              <a:spcAft>
-                <a:spcPts val="600"/>
-              </a:spcAft>
-            </a:pPr>
-            <a:r>
-              <a:rPr sz="1500">
-                <a:solidFill>
-                  <a:srgbClr val="22282E"/>
-                </a:solidFill>
-              </a:rPr>
-              <a:t>•  Criterio de aceptación: presentas la salida de los 5 tests atómicos (con su limpieza), la operación de Caldera con su secuencia de abilities, y una capa de Navigator que marca cada técnica emulada como detectada o no, con la regla pendiente para las no detectadas.</a:t>
+              <a:t>•  Instala Atomic Red Team:</a:t>
+            </a:r>
+          </a:p>
+          <a:p>
+            <a:pPr>
+              <a:spcAft>
+                <a:spcPts val="600"/>
+              </a:spcAft>
+            </a:pPr>
+            <a:r>
+              <a:rPr sz="1500">
+                <a:solidFill>
+                  <a:srgbClr val="22282E"/>
+                </a:solidFill>
+              </a:rPr>
+              <a:t>•  Ejecuta un test atómico. Lanza un test de una técnica de esta parte, p. ej. Kerberoasting o T1059.001:</a:t>
+            </a:r>
+          </a:p>
+          <a:p>
+            <a:pPr>
+              <a:spcAft>
+                <a:spcPts val="600"/>
+              </a:spcAft>
+            </a:pPr>
+            <a:r>
+              <a:rPr sz="1500">
+                <a:solidFill>
+                  <a:srgbClr val="22282E"/>
+                </a:solidFill>
+              </a:rPr>
+              <a:t>•  Luego limpia con -Cleanup.</a:t>
+            </a:r>
+          </a:p>
+          <a:p>
+            <a:pPr>
+              <a:spcAft>
+                <a:spcPts val="600"/>
+              </a:spcAft>
+            </a:pPr>
+            <a:r>
+              <a:rPr sz="1500">
+                <a:solidFill>
+                  <a:srgbClr val="22282E"/>
+                </a:solidFill>
+              </a:rPr>
+              <a:t>•  Valida la detección. Busca en tu SIEM/EDR el evento asociado y confirma si hubo alerta.</a:t>
+            </a:r>
+          </a:p>
+          <a:p>
+            <a:pPr>
+              <a:spcAft>
+                <a:spcPts val="600"/>
+              </a:spcAft>
+            </a:pPr>
+            <a:r>
+              <a:rPr sz="1500">
+                <a:solidFill>
+                  <a:srgbClr val="22282E"/>
+                </a:solidFill>
+              </a:rPr>
+              <a:t>•  Despliega Apache Caldera. Usa una versión fijada del repositorio actual, crea un entorno virtual y sigue la guía de esa versión. Arranca el servidor solo dentro de la red aislada; abre la consola y…</a:t>
+            </a:r>
+          </a:p>
+          <a:p>
+            <a:pPr>
+              <a:spcAft>
+                <a:spcPts val="600"/>
+              </a:spcAft>
+            </a:pPr>
+            <a:r>
+              <a:rPr sz="1500">
+                <a:solidFill>
+                  <a:srgbClr val="22282E"/>
+                </a:solidFill>
+              </a:rPr>
+              <a:t>•  Lanza una operación. Usa un adversary profile existente (p. ej. "Discovery") o crea uno encadenando abilities de discovery → credential access.</a:t>
+            </a:r>
+          </a:p>
+          <a:p>
+            <a:pPr>
+              <a:spcAft>
+                <a:spcPts val="600"/>
+              </a:spcAft>
+            </a:pPr>
+            <a:r>
+              <a:rPr sz="1500">
+                <a:solidFill>
+                  <a:srgbClr val="22282E"/>
+                </a:solidFill>
+              </a:rPr>
+              <a:t>•  Observa la cadena. Sigue en Caldera qué abilities ejecuta el planner y correlaciona cada una con la telemetría en el SIEM.</a:t>
             </a:r>
           </a:p>
         </p:txBody>
